--- a/assets/figures-editable/c3-c4/c3-e31.pptx
+++ b/assets/figures-editable/c3-c4/c3-e31.pptx
@@ -3104,8 +3104,8 @@
         </p:nvSpPr>
         <p:spPr>
           <a:xfrm>
-            <a:off x="274320" y="137160"/>
-            <a:ext cx="11612880" cy="365760"/>
+            <a:off x="274320" y="118872"/>
+            <a:ext cx="11612880" cy="340105"/>
           </a:xfrm>
           <a:prstGeom prst="rect">
             <a:avLst/>
@@ -3114,7 +3114,7 @@
           <a:effectLst/>
         </p:spPr>
         <p:txBody>
-          <a:bodyPr wrap="square" lIns="27432" rIns="27432" tIns="18288" bIns="18288" anchor="ctr">
+          <a:bodyPr wrap="none" lIns="18288" rIns="18288" tIns="18288" bIns="18288" anchor="t">
             <a:spAutoFit/>
           </a:bodyPr>
           <a:lstStyle/>
@@ -3125,7 +3125,7 @@
               </a:spcAft>
             </a:pPr>
             <a:r>
-              <a:rPr sz="2100" b="0" i="0">
+              <a:rPr sz="1900" b="1" i="0">
                 <a:solidFill>
                   <a:srgbClr val="8EDBD4"/>
                 </a:solidFill>
@@ -3136,23 +3136,20 @@
           </a:p>
         </p:txBody>
       </p:sp>
-      <p:sp>
-        <p:nvSpPr>
-          <p:cNvPr id="3" name="C3-E31 ellipse 1" descr="sci-ppt:o001"/>
-          <p:cNvSpPr/>
+      <p:cxnSp>
+        <p:nvCxnSpPr>
+          <p:cNvPr id="3" name="C3-E31 line 1" descr="sci-ppt:o001"/>
+          <p:cNvCxnSpPr/>
           <p:nvPr/>
-        </p:nvSpPr>
-        <p:spPr>
-          <a:xfrm>
-            <a:off x="1417319" y="1280160"/>
-            <a:ext cx="1554480" cy="1554480"/>
-          </a:xfrm>
-          <a:prstGeom prst="ellipse">
+        </p:nvCxnSpPr>
+        <p:spPr>
+          <a:xfrm>
+            <a:off x="8686800" y="4526280"/>
+            <a:ext cx="3017520" cy="0"/>
+          </a:xfrm>
+          <a:prstGeom prst="line">
             <a:avLst/>
           </a:prstGeom>
-          <a:solidFill>
-            <a:srgbClr val="213E4B"/>
-          </a:solidFill>
           <a:ln w="19050">
             <a:solidFill>
               <a:srgbClr val="B4C7D2"/>
@@ -3160,31 +3157,21 @@
           </a:ln>
           <a:effectLst/>
         </p:spPr>
-        <p:txBody>
-          <a:bodyPr rtlCol="0" anchor="ctr"/>
-          <a:lstStyle/>
-          <a:p>
-            <a:pPr algn="ctr"/>
-          </a:p>
-        </p:txBody>
-      </p:sp>
-      <p:sp>
-        <p:nvSpPr>
-          <p:cNvPr id="4" name="C3-E31 ellipse 2" descr="sci-ppt:o002"/>
-          <p:cNvSpPr/>
+      </p:cxnSp>
+      <p:cxnSp>
+        <p:nvCxnSpPr>
+          <p:cNvPr id="4" name="C3-E31 line 2" descr="sci-ppt:o002"/>
+          <p:cNvCxnSpPr/>
           <p:nvPr/>
-        </p:nvSpPr>
-        <p:spPr>
-          <a:xfrm>
-            <a:off x="7909560" y="1280160"/>
-            <a:ext cx="1554480" cy="1554480"/>
-          </a:xfrm>
-          <a:prstGeom prst="ellipse">
+        </p:nvCxnSpPr>
+        <p:spPr>
+          <a:xfrm>
+            <a:off x="8686800" y="1783080"/>
+            <a:ext cx="0" cy="2743200"/>
+          </a:xfrm>
+          <a:prstGeom prst="line">
             <a:avLst/>
           </a:prstGeom>
-          <a:solidFill>
-            <a:srgbClr val="213E4B"/>
-          </a:solidFill>
           <a:ln w="19050">
             <a:solidFill>
               <a:srgbClr val="B4C7D2"/>
@@ -3192,24 +3179,61 @@
           </a:ln>
           <a:effectLst/>
         </p:spPr>
-        <p:txBody>
-          <a:bodyPr rtlCol="0" anchor="ctr"/>
-          <a:lstStyle/>
-          <a:p>
-            <a:pPr algn="ctr"/>
-          </a:p>
-        </p:txBody>
-      </p:sp>
-      <p:sp>
-        <p:nvSpPr>
-          <p:cNvPr id="5" name="C3-E31 text 3" descr="sci-ppt:o003"/>
+      </p:cxnSp>
+      <p:cxnSp>
+        <p:nvCxnSpPr>
+          <p:cNvPr id="5" name="C3-E31 line 3" descr="sci-ppt:o003"/>
+          <p:cNvCxnSpPr/>
+          <p:nvPr/>
+        </p:nvCxnSpPr>
+        <p:spPr>
+          <a:xfrm>
+            <a:off x="8686800" y="4526280"/>
+            <a:ext cx="0" cy="64008"/>
+          </a:xfrm>
+          <a:prstGeom prst="line">
+            <a:avLst/>
+          </a:prstGeom>
+          <a:ln w="12700">
+            <a:solidFill>
+              <a:srgbClr val="B4C7D2"/>
+            </a:solidFill>
+          </a:ln>
+          <a:effectLst/>
+        </p:spPr>
+      </p:cxnSp>
+      <p:cxnSp>
+        <p:nvCxnSpPr>
+          <p:cNvPr id="6" name="C3-E31 line 4" descr="sci-ppt:o004"/>
+          <p:cNvCxnSpPr/>
+          <p:nvPr/>
+        </p:nvCxnSpPr>
+        <p:spPr>
+          <a:xfrm>
+            <a:off x="8686800" y="1783080"/>
+            <a:ext cx="0" cy="2743200"/>
+          </a:xfrm>
+          <a:prstGeom prst="line">
+            <a:avLst/>
+          </a:prstGeom>
+          <a:ln w="7620">
+            <a:solidFill>
+              <a:srgbClr val="2E4756"/>
+            </a:solidFill>
+          </a:ln>
+          <a:effectLst/>
+        </p:spPr>
+      </p:cxnSp>
+      <p:sp>
+        <p:nvSpPr>
+          <p:cNvPr id="7" name="C3-E31 text 5" descr="sci-ppt:o005"/>
           <p:cNvSpPr txBox="1"/>
           <p:nvPr/>
         </p:nvSpPr>
         <p:spPr>
           <a:xfrm>
-            <a:off x="1645920" y="1874519"/>
-            <a:ext cx="1463040" cy="365760"/>
+            <a:off x="8229600" y="4608576"/>
+            <a:ext cx="914400" cy="208407"/>
           </a:xfrm>
           <a:prstGeom prst="rect">
             <a:avLst/>
@@ -3218,7 +3242,697 @@
           <a:effectLst/>
         </p:spPr>
         <p:txBody>
-          <a:bodyPr wrap="square" lIns="27432" rIns="27432" tIns="18288" bIns="18288" anchor="ctr">
+          <a:bodyPr wrap="none" lIns="18288" rIns="18288" tIns="18288" bIns="18288" anchor="t">
+            <a:spAutoFit/>
+          </a:bodyPr>
+          <a:lstStyle/>
+          <a:p>
+            <a:pPr algn="ctr">
+              <a:spcAft>
+                <a:spcPts val="0"/>
+              </a:spcAft>
+            </a:pPr>
+            <a:r>
+              <a:rPr sz="1050" b="0" i="0">
+                <a:solidFill>
+                  <a:srgbClr val="B4C7D2"/>
+                </a:solidFill>
+                <a:latin typeface="Arial"/>
+              </a:rPr>
+              <a:t>1</a:t>
+            </a:r>
+          </a:p>
+        </p:txBody>
+      </p:sp>
+      <p:cxnSp>
+        <p:nvCxnSpPr>
+          <p:cNvPr id="8" name="C3-E31 line 6" descr="sci-ppt:o006"/>
+          <p:cNvCxnSpPr/>
+          <p:nvPr/>
+        </p:nvCxnSpPr>
+        <p:spPr>
+          <a:xfrm>
+            <a:off x="9189720" y="4526280"/>
+            <a:ext cx="0" cy="64008"/>
+          </a:xfrm>
+          <a:prstGeom prst="line">
+            <a:avLst/>
+          </a:prstGeom>
+          <a:ln w="12700">
+            <a:solidFill>
+              <a:srgbClr val="B4C7D2"/>
+            </a:solidFill>
+          </a:ln>
+          <a:effectLst/>
+        </p:spPr>
+      </p:cxnSp>
+      <p:cxnSp>
+        <p:nvCxnSpPr>
+          <p:cNvPr id="9" name="C3-E31 line 7" descr="sci-ppt:o007"/>
+          <p:cNvCxnSpPr/>
+          <p:nvPr/>
+        </p:nvCxnSpPr>
+        <p:spPr>
+          <a:xfrm>
+            <a:off x="9189720" y="1783080"/>
+            <a:ext cx="0" cy="2743200"/>
+          </a:xfrm>
+          <a:prstGeom prst="line">
+            <a:avLst/>
+          </a:prstGeom>
+          <a:ln w="7620">
+            <a:solidFill>
+              <a:srgbClr val="2E4756"/>
+            </a:solidFill>
+          </a:ln>
+          <a:effectLst/>
+        </p:spPr>
+      </p:cxnSp>
+      <p:sp>
+        <p:nvSpPr>
+          <p:cNvPr id="10" name="C3-E31 text 8" descr="sci-ppt:o008"/>
+          <p:cNvSpPr txBox="1"/>
+          <p:nvPr/>
+        </p:nvSpPr>
+        <p:spPr>
+          <a:xfrm>
+            <a:off x="8732520" y="4608576"/>
+            <a:ext cx="914400" cy="208407"/>
+          </a:xfrm>
+          <a:prstGeom prst="rect">
+            <a:avLst/>
+          </a:prstGeom>
+          <a:noFill/>
+          <a:effectLst/>
+        </p:spPr>
+        <p:txBody>
+          <a:bodyPr wrap="none" lIns="18288" rIns="18288" tIns="18288" bIns="18288" anchor="t">
+            <a:spAutoFit/>
+          </a:bodyPr>
+          <a:lstStyle/>
+          <a:p>
+            <a:pPr algn="ctr">
+              <a:spcAft>
+                <a:spcPts val="0"/>
+              </a:spcAft>
+            </a:pPr>
+            <a:r>
+              <a:rPr sz="1050" b="0" i="0">
+                <a:solidFill>
+                  <a:srgbClr val="B4C7D2"/>
+                </a:solidFill>
+                <a:latin typeface="Arial"/>
+              </a:rPr>
+              <a:t>5</a:t>
+            </a:r>
+          </a:p>
+        </p:txBody>
+      </p:sp>
+      <p:cxnSp>
+        <p:nvCxnSpPr>
+          <p:cNvPr id="11" name="C3-E31 line 9" descr="sci-ppt:o009"/>
+          <p:cNvCxnSpPr/>
+          <p:nvPr/>
+        </p:nvCxnSpPr>
+        <p:spPr>
+          <a:xfrm>
+            <a:off x="9818370" y="4526280"/>
+            <a:ext cx="0" cy="64008"/>
+          </a:xfrm>
+          <a:prstGeom prst="line">
+            <a:avLst/>
+          </a:prstGeom>
+          <a:ln w="12700">
+            <a:solidFill>
+              <a:srgbClr val="B4C7D2"/>
+            </a:solidFill>
+          </a:ln>
+          <a:effectLst/>
+        </p:spPr>
+      </p:cxnSp>
+      <p:cxnSp>
+        <p:nvCxnSpPr>
+          <p:cNvPr id="12" name="C3-E31 line 10" descr="sci-ppt:o010"/>
+          <p:cNvCxnSpPr/>
+          <p:nvPr/>
+        </p:nvCxnSpPr>
+        <p:spPr>
+          <a:xfrm>
+            <a:off x="9818370" y="1783080"/>
+            <a:ext cx="0" cy="2743200"/>
+          </a:xfrm>
+          <a:prstGeom prst="line">
+            <a:avLst/>
+          </a:prstGeom>
+          <a:ln w="7620">
+            <a:solidFill>
+              <a:srgbClr val="2E4756"/>
+            </a:solidFill>
+          </a:ln>
+          <a:effectLst/>
+        </p:spPr>
+      </p:cxnSp>
+      <p:sp>
+        <p:nvSpPr>
+          <p:cNvPr id="13" name="C3-E31 text 11" descr="sci-ppt:o011"/>
+          <p:cNvSpPr txBox="1"/>
+          <p:nvPr/>
+        </p:nvSpPr>
+        <p:spPr>
+          <a:xfrm>
+            <a:off x="9361170" y="4608576"/>
+            <a:ext cx="914400" cy="208407"/>
+          </a:xfrm>
+          <a:prstGeom prst="rect">
+            <a:avLst/>
+          </a:prstGeom>
+          <a:noFill/>
+          <a:effectLst/>
+        </p:spPr>
+        <p:txBody>
+          <a:bodyPr wrap="none" lIns="18288" rIns="18288" tIns="18288" bIns="18288" anchor="t">
+            <a:spAutoFit/>
+          </a:bodyPr>
+          <a:lstStyle/>
+          <a:p>
+            <a:pPr algn="ctr">
+              <a:spcAft>
+                <a:spcPts val="0"/>
+              </a:spcAft>
+            </a:pPr>
+            <a:r>
+              <a:rPr sz="1050" b="0" i="0">
+                <a:solidFill>
+                  <a:srgbClr val="B4C7D2"/>
+                </a:solidFill>
+                <a:latin typeface="Arial"/>
+              </a:rPr>
+              <a:t>10</a:t>
+            </a:r>
+          </a:p>
+        </p:txBody>
+      </p:sp>
+      <p:cxnSp>
+        <p:nvCxnSpPr>
+          <p:cNvPr id="14" name="C3-E31 line 12" descr="sci-ppt:o012"/>
+          <p:cNvCxnSpPr/>
+          <p:nvPr/>
+        </p:nvCxnSpPr>
+        <p:spPr>
+          <a:xfrm>
+            <a:off x="10447020" y="4526280"/>
+            <a:ext cx="0" cy="64008"/>
+          </a:xfrm>
+          <a:prstGeom prst="line">
+            <a:avLst/>
+          </a:prstGeom>
+          <a:ln w="12700">
+            <a:solidFill>
+              <a:srgbClr val="B4C7D2"/>
+            </a:solidFill>
+          </a:ln>
+          <a:effectLst/>
+        </p:spPr>
+      </p:cxnSp>
+      <p:cxnSp>
+        <p:nvCxnSpPr>
+          <p:cNvPr id="15" name="C3-E31 line 13" descr="sci-ppt:o013"/>
+          <p:cNvCxnSpPr/>
+          <p:nvPr/>
+        </p:nvCxnSpPr>
+        <p:spPr>
+          <a:xfrm>
+            <a:off x="10447020" y="1783080"/>
+            <a:ext cx="0" cy="2743200"/>
+          </a:xfrm>
+          <a:prstGeom prst="line">
+            <a:avLst/>
+          </a:prstGeom>
+          <a:ln w="7620">
+            <a:solidFill>
+              <a:srgbClr val="2E4756"/>
+            </a:solidFill>
+          </a:ln>
+          <a:effectLst/>
+        </p:spPr>
+      </p:cxnSp>
+      <p:sp>
+        <p:nvSpPr>
+          <p:cNvPr id="16" name="C3-E31 text 14" descr="sci-ppt:o014"/>
+          <p:cNvSpPr txBox="1"/>
+          <p:nvPr/>
+        </p:nvSpPr>
+        <p:spPr>
+          <a:xfrm>
+            <a:off x="9989820" y="4608576"/>
+            <a:ext cx="914400" cy="208407"/>
+          </a:xfrm>
+          <a:prstGeom prst="rect">
+            <a:avLst/>
+          </a:prstGeom>
+          <a:noFill/>
+          <a:effectLst/>
+        </p:spPr>
+        <p:txBody>
+          <a:bodyPr wrap="none" lIns="18288" rIns="18288" tIns="18288" bIns="18288" anchor="t">
+            <a:spAutoFit/>
+          </a:bodyPr>
+          <a:lstStyle/>
+          <a:p>
+            <a:pPr algn="ctr">
+              <a:spcAft>
+                <a:spcPts val="0"/>
+              </a:spcAft>
+            </a:pPr>
+            <a:r>
+              <a:rPr sz="1050" b="0" i="0">
+                <a:solidFill>
+                  <a:srgbClr val="B4C7D2"/>
+                </a:solidFill>
+                <a:latin typeface="Arial"/>
+              </a:rPr>
+              <a:t>15</a:t>
+            </a:r>
+          </a:p>
+        </p:txBody>
+      </p:sp>
+      <p:cxnSp>
+        <p:nvCxnSpPr>
+          <p:cNvPr id="17" name="C3-E31 line 15" descr="sci-ppt:o015"/>
+          <p:cNvCxnSpPr/>
+          <p:nvPr/>
+        </p:nvCxnSpPr>
+        <p:spPr>
+          <a:xfrm>
+            <a:off x="11075670" y="4526280"/>
+            <a:ext cx="0" cy="64008"/>
+          </a:xfrm>
+          <a:prstGeom prst="line">
+            <a:avLst/>
+          </a:prstGeom>
+          <a:ln w="12700">
+            <a:solidFill>
+              <a:srgbClr val="B4C7D2"/>
+            </a:solidFill>
+          </a:ln>
+          <a:effectLst/>
+        </p:spPr>
+      </p:cxnSp>
+      <p:cxnSp>
+        <p:nvCxnSpPr>
+          <p:cNvPr id="18" name="C3-E31 line 16" descr="sci-ppt:o016"/>
+          <p:cNvCxnSpPr/>
+          <p:nvPr/>
+        </p:nvCxnSpPr>
+        <p:spPr>
+          <a:xfrm>
+            <a:off x="11075670" y="1783080"/>
+            <a:ext cx="0" cy="2743200"/>
+          </a:xfrm>
+          <a:prstGeom prst="line">
+            <a:avLst/>
+          </a:prstGeom>
+          <a:ln w="7620">
+            <a:solidFill>
+              <a:srgbClr val="2E4756"/>
+            </a:solidFill>
+          </a:ln>
+          <a:effectLst/>
+        </p:spPr>
+      </p:cxnSp>
+      <p:sp>
+        <p:nvSpPr>
+          <p:cNvPr id="19" name="C3-E31 text 17" descr="sci-ppt:o017"/>
+          <p:cNvSpPr txBox="1"/>
+          <p:nvPr/>
+        </p:nvSpPr>
+        <p:spPr>
+          <a:xfrm>
+            <a:off x="10618470" y="4608576"/>
+            <a:ext cx="914400" cy="208407"/>
+          </a:xfrm>
+          <a:prstGeom prst="rect">
+            <a:avLst/>
+          </a:prstGeom>
+          <a:noFill/>
+          <a:effectLst/>
+        </p:spPr>
+        <p:txBody>
+          <a:bodyPr wrap="none" lIns="18288" rIns="18288" tIns="18288" bIns="18288" anchor="t">
+            <a:spAutoFit/>
+          </a:bodyPr>
+          <a:lstStyle/>
+          <a:p>
+            <a:pPr algn="ctr">
+              <a:spcAft>
+                <a:spcPts val="0"/>
+              </a:spcAft>
+            </a:pPr>
+            <a:r>
+              <a:rPr sz="1050" b="0" i="0">
+                <a:solidFill>
+                  <a:srgbClr val="B4C7D2"/>
+                </a:solidFill>
+                <a:latin typeface="Arial"/>
+              </a:rPr>
+              <a:t>20</a:t>
+            </a:r>
+          </a:p>
+        </p:txBody>
+      </p:sp>
+      <p:cxnSp>
+        <p:nvCxnSpPr>
+          <p:cNvPr id="20" name="C3-E31 line 18" descr="sci-ppt:o018"/>
+          <p:cNvCxnSpPr/>
+          <p:nvPr/>
+        </p:nvCxnSpPr>
+        <p:spPr>
+          <a:xfrm>
+            <a:off x="11704320" y="4526280"/>
+            <a:ext cx="0" cy="64008"/>
+          </a:xfrm>
+          <a:prstGeom prst="line">
+            <a:avLst/>
+          </a:prstGeom>
+          <a:ln w="12700">
+            <a:solidFill>
+              <a:srgbClr val="B4C7D2"/>
+            </a:solidFill>
+          </a:ln>
+          <a:effectLst/>
+        </p:spPr>
+      </p:cxnSp>
+      <p:cxnSp>
+        <p:nvCxnSpPr>
+          <p:cNvPr id="21" name="C3-E31 line 19" descr="sci-ppt:o019"/>
+          <p:cNvCxnSpPr/>
+          <p:nvPr/>
+        </p:nvCxnSpPr>
+        <p:spPr>
+          <a:xfrm>
+            <a:off x="11704320" y="1783080"/>
+            <a:ext cx="0" cy="2743200"/>
+          </a:xfrm>
+          <a:prstGeom prst="line">
+            <a:avLst/>
+          </a:prstGeom>
+          <a:ln w="7620">
+            <a:solidFill>
+              <a:srgbClr val="2E4756"/>
+            </a:solidFill>
+          </a:ln>
+          <a:effectLst/>
+        </p:spPr>
+      </p:cxnSp>
+      <p:sp>
+        <p:nvSpPr>
+          <p:cNvPr id="22" name="C3-E31 text 20" descr="sci-ppt:o020"/>
+          <p:cNvSpPr txBox="1"/>
+          <p:nvPr/>
+        </p:nvSpPr>
+        <p:spPr>
+          <a:xfrm>
+            <a:off x="11247120" y="4608576"/>
+            <a:ext cx="914400" cy="208407"/>
+          </a:xfrm>
+          <a:prstGeom prst="rect">
+            <a:avLst/>
+          </a:prstGeom>
+          <a:noFill/>
+          <a:effectLst/>
+        </p:spPr>
+        <p:txBody>
+          <a:bodyPr wrap="none" lIns="18288" rIns="18288" tIns="18288" bIns="18288" anchor="t">
+            <a:spAutoFit/>
+          </a:bodyPr>
+          <a:lstStyle/>
+          <a:p>
+            <a:pPr algn="ctr">
+              <a:spcAft>
+                <a:spcPts val="0"/>
+              </a:spcAft>
+            </a:pPr>
+            <a:r>
+              <a:rPr sz="1050" b="0" i="0">
+                <a:solidFill>
+                  <a:srgbClr val="B4C7D2"/>
+                </a:solidFill>
+                <a:latin typeface="Arial"/>
+              </a:rPr>
+              <a:t>25</a:t>
+            </a:r>
+          </a:p>
+        </p:txBody>
+      </p:sp>
+      <p:cxnSp>
+        <p:nvCxnSpPr>
+          <p:cNvPr id="23" name="C3-E31 line 21" descr="sci-ppt:o021"/>
+          <p:cNvCxnSpPr/>
+          <p:nvPr/>
+        </p:nvCxnSpPr>
+        <p:spPr>
+          <a:xfrm>
+            <a:off x="8622792" y="4526280"/>
+            <a:ext cx="64008" cy="0"/>
+          </a:xfrm>
+          <a:prstGeom prst="line">
+            <a:avLst/>
+          </a:prstGeom>
+          <a:ln w="12700">
+            <a:solidFill>
+              <a:srgbClr val="B4C7D2"/>
+            </a:solidFill>
+          </a:ln>
+          <a:effectLst/>
+        </p:spPr>
+      </p:cxnSp>
+      <p:cxnSp>
+        <p:nvCxnSpPr>
+          <p:cNvPr id="24" name="C3-E31 line 22" descr="sci-ppt:o022"/>
+          <p:cNvCxnSpPr/>
+          <p:nvPr/>
+        </p:nvCxnSpPr>
+        <p:spPr>
+          <a:xfrm>
+            <a:off x="8622792" y="3279370"/>
+            <a:ext cx="64008" cy="0"/>
+          </a:xfrm>
+          <a:prstGeom prst="line">
+            <a:avLst/>
+          </a:prstGeom>
+          <a:ln w="12700">
+            <a:solidFill>
+              <a:srgbClr val="B4C7D2"/>
+            </a:solidFill>
+          </a:ln>
+          <a:effectLst/>
+        </p:spPr>
+      </p:cxnSp>
+      <p:cxnSp>
+        <p:nvCxnSpPr>
+          <p:cNvPr id="25" name="C3-E31 line 23" descr="sci-ppt:o023"/>
+          <p:cNvCxnSpPr/>
+          <p:nvPr/>
+        </p:nvCxnSpPr>
+        <p:spPr>
+          <a:xfrm>
+            <a:off x="8686800" y="3279370"/>
+            <a:ext cx="3017520" cy="0"/>
+          </a:xfrm>
+          <a:prstGeom prst="line">
+            <a:avLst/>
+          </a:prstGeom>
+          <a:ln w="7620">
+            <a:solidFill>
+              <a:srgbClr val="2E4756"/>
+            </a:solidFill>
+          </a:ln>
+          <a:effectLst/>
+        </p:spPr>
+      </p:cxnSp>
+      <p:sp>
+        <p:nvSpPr>
+          <p:cNvPr id="26" name="C3-E31 text 24" descr="sci-ppt:o024"/>
+          <p:cNvSpPr txBox="1"/>
+          <p:nvPr/>
+        </p:nvSpPr>
+        <p:spPr>
+          <a:xfrm>
+            <a:off x="7818120" y="3197074"/>
+            <a:ext cx="777240" cy="208407"/>
+          </a:xfrm>
+          <a:prstGeom prst="rect">
+            <a:avLst/>
+          </a:prstGeom>
+          <a:noFill/>
+          <a:effectLst/>
+        </p:spPr>
+        <p:txBody>
+          <a:bodyPr wrap="none" lIns="18288" rIns="18288" tIns="18288" bIns="18288" anchor="t">
+            <a:spAutoFit/>
+          </a:bodyPr>
+          <a:lstStyle/>
+          <a:p>
+            <a:pPr algn="r">
+              <a:spcAft>
+                <a:spcPts val="0"/>
+              </a:spcAft>
+            </a:pPr>
+            <a:r>
+              <a:rPr sz="1050" b="0" i="0">
+                <a:solidFill>
+                  <a:srgbClr val="B4C7D2"/>
+                </a:solidFill>
+                <a:latin typeface="Arial"/>
+              </a:rPr>
+              <a:t>0.5</a:t>
+            </a:r>
+          </a:p>
+        </p:txBody>
+      </p:sp>
+      <p:cxnSp>
+        <p:nvCxnSpPr>
+          <p:cNvPr id="27" name="C3-E31 line 25" descr="sci-ppt:o025"/>
+          <p:cNvCxnSpPr/>
+          <p:nvPr/>
+        </p:nvCxnSpPr>
+        <p:spPr>
+          <a:xfrm>
+            <a:off x="8622792" y="2032461"/>
+            <a:ext cx="64008" cy="0"/>
+          </a:xfrm>
+          <a:prstGeom prst="line">
+            <a:avLst/>
+          </a:prstGeom>
+          <a:ln w="12700">
+            <a:solidFill>
+              <a:srgbClr val="B4C7D2"/>
+            </a:solidFill>
+          </a:ln>
+          <a:effectLst/>
+        </p:spPr>
+      </p:cxnSp>
+      <p:cxnSp>
+        <p:nvCxnSpPr>
+          <p:cNvPr id="28" name="C3-E31 line 26" descr="sci-ppt:o026"/>
+          <p:cNvCxnSpPr/>
+          <p:nvPr/>
+        </p:nvCxnSpPr>
+        <p:spPr>
+          <a:xfrm>
+            <a:off x="8686800" y="2032461"/>
+            <a:ext cx="3017520" cy="0"/>
+          </a:xfrm>
+          <a:prstGeom prst="line">
+            <a:avLst/>
+          </a:prstGeom>
+          <a:ln w="7620">
+            <a:solidFill>
+              <a:srgbClr val="2E4756"/>
+            </a:solidFill>
+          </a:ln>
+          <a:effectLst/>
+        </p:spPr>
+      </p:cxnSp>
+      <p:sp>
+        <p:nvSpPr>
+          <p:cNvPr id="29" name="C3-E31 text 27" descr="sci-ppt:o027"/>
+          <p:cNvSpPr txBox="1"/>
+          <p:nvPr/>
+        </p:nvSpPr>
+        <p:spPr>
+          <a:xfrm>
+            <a:off x="7818120" y="1950165"/>
+            <a:ext cx="777240" cy="208407"/>
+          </a:xfrm>
+          <a:prstGeom prst="rect">
+            <a:avLst/>
+          </a:prstGeom>
+          <a:noFill/>
+          <a:effectLst/>
+        </p:spPr>
+        <p:txBody>
+          <a:bodyPr wrap="none" lIns="18288" rIns="18288" tIns="18288" bIns="18288" anchor="t">
+            <a:spAutoFit/>
+          </a:bodyPr>
+          <a:lstStyle/>
+          <a:p>
+            <a:pPr algn="r">
+              <a:spcAft>
+                <a:spcPts val="0"/>
+              </a:spcAft>
+            </a:pPr>
+            <a:r>
+              <a:rPr sz="1050" b="0" i="0">
+                <a:solidFill>
+                  <a:srgbClr val="B4C7D2"/>
+                </a:solidFill>
+                <a:latin typeface="Arial"/>
+              </a:rPr>
+              <a:t>1.0</a:t>
+            </a:r>
+          </a:p>
+        </p:txBody>
+      </p:sp>
+      <p:sp>
+        <p:nvSpPr>
+          <p:cNvPr id="30" name="C3-E31 text 28" descr="sci-ppt:o028"/>
+          <p:cNvSpPr txBox="1"/>
+          <p:nvPr/>
+        </p:nvSpPr>
+        <p:spPr>
+          <a:xfrm>
+            <a:off x="8686800" y="4809744"/>
+            <a:ext cx="3017520" cy="231648"/>
+          </a:xfrm>
+          <a:prstGeom prst="rect">
+            <a:avLst/>
+          </a:prstGeom>
+          <a:noFill/>
+          <a:effectLst/>
+        </p:spPr>
+        <p:txBody>
+          <a:bodyPr wrap="none" lIns="18288" rIns="18288" tIns="18288" bIns="18288" anchor="t">
+            <a:spAutoFit/>
+          </a:bodyPr>
+          <a:lstStyle/>
+          <a:p>
+            <a:pPr algn="ctr">
+              <a:spcAft>
+                <a:spcPts val="0"/>
+              </a:spcAft>
+            </a:pPr>
+            <a:r>
+              <a:rPr sz="1200" b="0" i="0">
+                <a:solidFill>
+                  <a:srgbClr val="E7F0F3"/>
+                </a:solidFill>
+                <a:latin typeface="Arial"/>
+              </a:rPr>
+              <a:t>N</a:t>
+            </a:r>
+          </a:p>
+        </p:txBody>
+      </p:sp>
+      <p:sp>
+        <p:nvSpPr>
+          <p:cNvPr id="31" name="C3-E31 text 29" descr="sci-ppt:o029"/>
+          <p:cNvSpPr txBox="1"/>
+          <p:nvPr/>
+        </p:nvSpPr>
+        <p:spPr>
+          <a:xfrm>
+            <a:off x="8138160" y="1435607"/>
+            <a:ext cx="3017520" cy="231648"/>
+          </a:xfrm>
+          <a:prstGeom prst="rect">
+            <a:avLst/>
+          </a:prstGeom>
+          <a:noFill/>
+          <a:effectLst/>
+        </p:spPr>
+        <p:txBody>
+          <a:bodyPr wrap="none" lIns="18288" rIns="18288" tIns="18288" bIns="18288" anchor="t">
             <a:spAutoFit/>
           </a:bodyPr>
           <a:lstStyle/>
@@ -3229,27 +3943,140 @@
               </a:spcAft>
             </a:pPr>
             <a:r>
-              <a:rPr sz="1700" b="0" i="0">
+              <a:rPr sz="1200" b="0" i="0">
                 <a:solidFill>
                   <a:srgbClr val="E7F0F3"/>
                 </a:solidFill>
                 <a:latin typeface="Arial"/>
               </a:rPr>
-              <a:t>j: source</a:t>
-            </a:r>
-          </a:p>
-        </p:txBody>
-      </p:sp>
-      <p:sp>
-        <p:nvSpPr>
-          <p:cNvPr id="6" name="C3-E31 text 4" descr="sci-ppt:o004"/>
+              <a:t>Rₘₐₓ,N / R_*</a:t>
+            </a:r>
+          </a:p>
+        </p:txBody>
+      </p:sp>
+      <p:sp>
+        <p:nvSpPr>
+          <p:cNvPr id="32" name="C3-E31 polygon 30" descr="sci-ppt:o030"/>
+          <p:cNvSpPr/>
+          <p:nvPr/>
+        </p:nvSpPr>
+        <p:spPr>
+          <a:xfrm>
+            <a:off x="8686800" y="2032461"/>
+            <a:ext cx="3017520" cy="1640945"/>
+          </a:xfrm>
+          <a:custGeom>
+            <a:avLst/>
+            <a:gdLst/>
+            <a:ahLst/>
+            <a:cxnLst/>
+            <a:rect l="l" t="t" r="r" b="b"/>
+            <a:pathLst>
+              <a:path w="3017520" h="1640945">
+                <a:moveTo>
+                  <a:pt x="0" y="0"/>
+                </a:moveTo>
+                <a:lnTo>
+                  <a:pt x="125730" y="514474"/>
+                </a:lnTo>
+                <a:lnTo>
+                  <a:pt x="251460" y="764702"/>
+                </a:lnTo>
+                <a:lnTo>
+                  <a:pt x="377190" y="922811"/>
+                </a:lnTo>
+                <a:lnTo>
+                  <a:pt x="502920" y="1035425"/>
+                </a:lnTo>
+                <a:lnTo>
+                  <a:pt x="628650" y="1121417"/>
+                </a:lnTo>
+                <a:lnTo>
+                  <a:pt x="754380" y="1190155"/>
+                </a:lnTo>
+                <a:lnTo>
+                  <a:pt x="880110" y="1246909"/>
+                </a:lnTo>
+                <a:lnTo>
+                  <a:pt x="1005840" y="1294916"/>
+                </a:lnTo>
+                <a:lnTo>
+                  <a:pt x="1131570" y="1336291"/>
+                </a:lnTo>
+                <a:lnTo>
+                  <a:pt x="1257300" y="1372487"/>
+                </a:lnTo>
+                <a:lnTo>
+                  <a:pt x="1383030" y="1404543"/>
+                </a:lnTo>
+                <a:lnTo>
+                  <a:pt x="1508760" y="1433222"/>
+                </a:lnTo>
+                <a:lnTo>
+                  <a:pt x="1634490" y="1459100"/>
+                </a:lnTo>
+                <a:lnTo>
+                  <a:pt x="1760220" y="1482625"/>
+                </a:lnTo>
+                <a:lnTo>
+                  <a:pt x="1885950" y="1504146"/>
+                </a:lnTo>
+                <a:lnTo>
+                  <a:pt x="2011680" y="1523945"/>
+                </a:lnTo>
+                <a:lnTo>
+                  <a:pt x="2137410" y="1542249"/>
+                </a:lnTo>
+                <a:lnTo>
+                  <a:pt x="2263140" y="1559245"/>
+                </a:lnTo>
+                <a:lnTo>
+                  <a:pt x="2388870" y="1575088"/>
+                </a:lnTo>
+                <a:lnTo>
+                  <a:pt x="2514600" y="1589909"/>
+                </a:lnTo>
+                <a:lnTo>
+                  <a:pt x="2640330" y="1603817"/>
+                </a:lnTo>
+                <a:lnTo>
+                  <a:pt x="2766060" y="1616908"/>
+                </a:lnTo>
+                <a:lnTo>
+                  <a:pt x="2891790" y="1629260"/>
+                </a:lnTo>
+                <a:lnTo>
+                  <a:pt x="3017520" y="1640945"/>
+                </a:lnTo>
+              </a:path>
+            </a:pathLst>
+          </a:custGeom>
+          <a:noFill/>
+          <a:ln w="38100">
+            <a:solidFill>
+              <a:srgbClr val="8EDBD4"/>
+            </a:solidFill>
+          </a:ln>
+          <a:effectLst/>
+        </p:spPr>
+        <p:txBody>
+          <a:bodyPr rtlCol="0" anchor="ctr"/>
+          <a:lstStyle/>
+          <a:p>
+            <a:pPr algn="ctr"/>
+          </a:p>
+        </p:txBody>
+      </p:sp>
+      <p:sp>
+        <p:nvSpPr>
+          <p:cNvPr id="33" name="C3-E31 text 31" descr="sci-ppt:o031"/>
           <p:cNvSpPr txBox="1"/>
           <p:nvPr/>
         </p:nvSpPr>
         <p:spPr>
           <a:xfrm>
-            <a:off x="8138160" y="1874519"/>
-            <a:ext cx="1554480" cy="365760"/>
+            <a:off x="7680960" y="960120"/>
+            <a:ext cx="4114800" cy="247142"/>
           </a:xfrm>
           <a:prstGeom prst="rect">
             <a:avLst/>
@@ -3258,7 +4085,7 @@
           <a:effectLst/>
         </p:spPr>
         <p:txBody>
-          <a:bodyPr wrap="square" lIns="27432" rIns="27432" tIns="18288" bIns="18288" anchor="ctr">
+          <a:bodyPr wrap="none" lIns="18288" rIns="18288" tIns="18288" bIns="18288" anchor="t">
             <a:spAutoFit/>
           </a:bodyPr>
           <a:lstStyle/>
@@ -3269,49 +4096,155 @@
               </a:spcAft>
             </a:pPr>
             <a:r>
-              <a:rPr sz="1700" b="0" i="0">
+              <a:rPr sz="1300" b="1" i="0">
+                <a:solidFill>
+                  <a:srgbClr val="8EDBD4"/>
+                </a:solidFill>
+                <a:latin typeface="Arial"/>
+              </a:rPr>
+              <a:t>Fixed total work shrinks each bubble</a:t>
+            </a:r>
+          </a:p>
+        </p:txBody>
+      </p:sp>
+      <p:sp>
+        <p:nvSpPr>
+          <p:cNvPr id="34" name="C3-E31 round_rect 32" descr="sci-ppt:o032"/>
+          <p:cNvSpPr/>
+          <p:nvPr/>
+        </p:nvSpPr>
+        <p:spPr>
+          <a:xfrm>
+            <a:off x="365760" y="914400"/>
+            <a:ext cx="7040880" cy="2377440"/>
+          </a:xfrm>
+          <a:prstGeom prst="roundRect">
+            <a:avLst/>
+          </a:prstGeom>
+          <a:solidFill>
+            <a:srgbClr val="213E4B"/>
+          </a:solidFill>
+          <a:ln w="20320">
+            <a:solidFill>
+              <a:srgbClr val="8EDBD4"/>
+            </a:solidFill>
+          </a:ln>
+          <a:effectLst/>
+        </p:spPr>
+        <p:txBody>
+          <a:bodyPr rtlCol="0" anchor="ctr"/>
+          <a:lstStyle/>
+          <a:p>
+            <a:pPr algn="ctr"/>
+          </a:p>
+        </p:txBody>
+      </p:sp>
+      <p:sp>
+        <p:nvSpPr>
+          <p:cNvPr id="35" name="C3-E31 text 33" descr="sci-ppt:o033"/>
+          <p:cNvSpPr txBox="1"/>
+          <p:nvPr/>
+        </p:nvSpPr>
+        <p:spPr>
+          <a:xfrm>
+            <a:off x="475488" y="969264"/>
+            <a:ext cx="6821424" cy="254889"/>
+          </a:xfrm>
+          <a:prstGeom prst="rect">
+            <a:avLst/>
+          </a:prstGeom>
+          <a:noFill/>
+          <a:effectLst/>
+        </p:spPr>
+        <p:txBody>
+          <a:bodyPr wrap="none" lIns="18288" rIns="18288" tIns="18288" bIns="18288" anchor="t">
+            <a:spAutoFit/>
+          </a:bodyPr>
+          <a:lstStyle/>
+          <a:p>
+            <a:pPr algn="l">
+              <a:spcAft>
+                <a:spcPts val="0"/>
+              </a:spcAft>
+            </a:pPr>
+            <a:r>
+              <a:rPr sz="1350" b="1" i="0">
+                <a:solidFill>
+                  <a:srgbClr val="8EDBD4"/>
+                </a:solidFill>
+                <a:latin typeface="Arial"/>
+              </a:rPr>
+              <a:t>Coupled radial equation</a:t>
+            </a:r>
+          </a:p>
+        </p:txBody>
+      </p:sp>
+      <p:sp>
+        <p:nvSpPr>
+          <p:cNvPr id="36" name="C3-E31 text 34" descr="sci-ppt:o034"/>
+          <p:cNvSpPr txBox="1"/>
+          <p:nvPr/>
+        </p:nvSpPr>
+        <p:spPr>
+          <a:xfrm>
+            <a:off x="502920" y="1371600"/>
+            <a:ext cx="6766560" cy="417576"/>
+          </a:xfrm>
+          <a:prstGeom prst="rect">
+            <a:avLst/>
+          </a:prstGeom>
+          <a:noFill/>
+          <a:effectLst/>
+        </p:spPr>
+        <p:txBody>
+          <a:bodyPr wrap="none" lIns="18288" rIns="18288" tIns="18288" bIns="18288" anchor="t">
+            <a:spAutoFit/>
+          </a:bodyPr>
+          <a:lstStyle/>
+          <a:p>
+            <a:pPr algn="l">
+              <a:spcAft>
+                <a:spcPts val="0"/>
+              </a:spcAft>
+            </a:pPr>
+            <a:r>
+              <a:rPr sz="1200" b="1" i="0">
                 <a:solidFill>
                   <a:srgbClr val="E7F0F3"/>
                 </a:solidFill>
                 <a:latin typeface="Arial"/>
               </a:rPr>
-              <a:t>i: receiver</a:t>
-            </a:r>
-          </a:p>
-        </p:txBody>
-      </p:sp>
-      <p:cxnSp>
-        <p:nvCxnSpPr>
-          <p:cNvPr id="7" name="C3-E31 line 5" descr="sci-ppt:o005"/>
-          <p:cNvCxnSpPr/>
-          <p:nvPr/>
-        </p:nvCxnSpPr>
-        <p:spPr>
-          <a:xfrm>
-            <a:off x="2194560" y="3108960"/>
-            <a:ext cx="6492240" cy="0"/>
-          </a:xfrm>
-          <a:prstGeom prst="line">
-            <a:avLst/>
-          </a:prstGeom>
-          <a:ln w="25400">
-            <a:solidFill>
-              <a:srgbClr val="8EDBD4"/>
-            </a:solidFill>
-          </a:ln>
-          <a:effectLst/>
-        </p:spPr>
-      </p:cxnSp>
-      <p:sp>
-        <p:nvSpPr>
-          <p:cNvPr id="8" name="C3-E31 text 6" descr="sci-ppt:o006"/>
+              <a:t>R_iR̈ᵢ + (3/2)Ṙᵢ² = [p_b,i − p∞ − 2σ_b/Rᵢ − 4μṘᵢ/Rᵢ]/ρ − Σ_{j≠i} (Rⱼ²R̈ⱼ +</a:t>
+            </a:r>
+          </a:p>
+          <a:p>
+            <a:pPr algn="l">
+              <a:spcAft>
+                <a:spcPts val="0"/>
+              </a:spcAft>
+            </a:pPr>
+            <a:r>
+              <a:rPr sz="1200" b="1" i="0">
+                <a:solidFill>
+                  <a:srgbClr val="E7F0F3"/>
+                </a:solidFill>
+                <a:latin typeface="Arial"/>
+              </a:rPr>
+              <a:t>2RⱼṘⱼ²)/dᵢⱼ</a:t>
+            </a:r>
+          </a:p>
+        </p:txBody>
+      </p:sp>
+      <p:sp>
+        <p:nvSpPr>
+          <p:cNvPr id="37" name="C3-E31 text 35" descr="sci-ppt:o035"/>
           <p:cNvSpPr txBox="1"/>
           <p:nvPr/>
         </p:nvSpPr>
         <p:spPr>
           <a:xfrm>
-            <a:off x="4846320" y="3200400"/>
-            <a:ext cx="1828800" cy="365760"/>
+            <a:off x="502920" y="2148840"/>
+            <a:ext cx="6766560" cy="433070"/>
           </a:xfrm>
           <a:prstGeom prst="rect">
             <a:avLst/>
@@ -3320,7 +4253,7 @@
           <a:effectLst/>
         </p:spPr>
         <p:txBody>
-          <a:bodyPr wrap="square" lIns="27432" rIns="27432" tIns="18288" bIns="18288" anchor="ctr">
+          <a:bodyPr wrap="none" lIns="18288" rIns="18288" tIns="18288" bIns="18288" anchor="t">
             <a:spAutoFit/>
           </a:bodyPr>
           <a:lstStyle/>
@@ -3331,51 +4264,155 @@
               </a:spcAft>
             </a:pPr>
             <a:r>
-              <a:rPr sz="1700" b="0" i="0">
+              <a:rPr sz="1250" b="0" i="0">
+                <a:solidFill>
+                  <a:srgbClr val="B4C7D2"/>
+                </a:solidFill>
+                <a:latin typeface="Arial"/>
+              </a:rPr>
+              <a:t>Neighbours change the pressure each bubble feels, so single-bubble results</a:t>
+            </a:r>
+          </a:p>
+          <a:p>
+            <a:pPr algn="l">
+              <a:spcAft>
+                <a:spcPts val="0"/>
+              </a:spcAft>
+            </a:pPr>
+            <a:r>
+              <a:rPr sz="1250" b="0" i="0">
+                <a:solidFill>
+                  <a:srgbClr val="B4C7D2"/>
+                </a:solidFill>
+                <a:latin typeface="Arial"/>
+              </a:rPr>
+              <a:t>cannot simply be multiplied by the count.</a:t>
+            </a:r>
+          </a:p>
+        </p:txBody>
+      </p:sp>
+      <p:sp>
+        <p:nvSpPr>
+          <p:cNvPr id="38" name="C3-E31 round_rect 36" descr="sci-ppt:o036"/>
+          <p:cNvSpPr/>
+          <p:nvPr/>
+        </p:nvSpPr>
+        <p:spPr>
+          <a:xfrm>
+            <a:off x="365760" y="3474720"/>
+            <a:ext cx="7040880" cy="2286000"/>
+          </a:xfrm>
+          <a:prstGeom prst="roundRect">
+            <a:avLst/>
+          </a:prstGeom>
+          <a:solidFill>
+            <a:srgbClr val="213E4B"/>
+          </a:solidFill>
+          <a:ln w="20320">
+            <a:solidFill>
+              <a:srgbClr val="F2B880"/>
+            </a:solidFill>
+          </a:ln>
+          <a:effectLst/>
+        </p:spPr>
+        <p:txBody>
+          <a:bodyPr rtlCol="0" anchor="ctr"/>
+          <a:lstStyle/>
+          <a:p>
+            <a:pPr algn="ctr"/>
+          </a:p>
+        </p:txBody>
+      </p:sp>
+      <p:sp>
+        <p:nvSpPr>
+          <p:cNvPr id="39" name="C3-E31 text 37" descr="sci-ppt:o037"/>
+          <p:cNvSpPr txBox="1"/>
+          <p:nvPr/>
+        </p:nvSpPr>
+        <p:spPr>
+          <a:xfrm>
+            <a:off x="475488" y="3529584"/>
+            <a:ext cx="6821424" cy="254889"/>
+          </a:xfrm>
+          <a:prstGeom prst="rect">
+            <a:avLst/>
+          </a:prstGeom>
+          <a:noFill/>
+          <a:effectLst/>
+        </p:spPr>
+        <p:txBody>
+          <a:bodyPr wrap="none" lIns="18288" rIns="18288" tIns="18288" bIns="18288" anchor="t">
+            <a:spAutoFit/>
+          </a:bodyPr>
+          <a:lstStyle/>
+          <a:p>
+            <a:pPr algn="l">
+              <a:spcAft>
+                <a:spcPts val="0"/>
+              </a:spcAft>
+            </a:pPr>
+            <a:r>
+              <a:rPr sz="1350" b="1" i="0">
+                <a:solidFill>
+                  <a:srgbClr val="F2B880"/>
+                </a:solidFill>
+                <a:latin typeface="Arial"/>
+              </a:rPr>
+              <a:t>Fixed total pressure work</a:t>
+            </a:r>
+          </a:p>
+        </p:txBody>
+      </p:sp>
+      <p:sp>
+        <p:nvSpPr>
+          <p:cNvPr id="40" name="C3-E31 text 38" descr="sci-ppt:o038"/>
+          <p:cNvSpPr txBox="1"/>
+          <p:nvPr/>
+        </p:nvSpPr>
+        <p:spPr>
+          <a:xfrm>
+            <a:off x="502920" y="3931920"/>
+            <a:ext cx="6766560" cy="247142"/>
+          </a:xfrm>
+          <a:prstGeom prst="rect">
+            <a:avLst/>
+          </a:prstGeom>
+          <a:noFill/>
+          <a:effectLst/>
+        </p:spPr>
+        <p:txBody>
+          <a:bodyPr wrap="none" lIns="18288" rIns="18288" tIns="18288" bIns="18288" anchor="t">
+            <a:spAutoFit/>
+          </a:bodyPr>
+          <a:lstStyle/>
+          <a:p>
+            <a:pPr algn="l">
+              <a:spcAft>
+                <a:spcPts val="0"/>
+              </a:spcAft>
+            </a:pPr>
+            <a:r>
+              <a:rPr sz="1300" b="1" i="0">
                 <a:solidFill>
                   <a:srgbClr val="E7F0F3"/>
                 </a:solidFill>
                 <a:latin typeface="Arial"/>
               </a:rPr>
-              <a:t>d_ij</a:t>
-            </a:r>
-          </a:p>
-        </p:txBody>
-      </p:sp>
-      <p:cxnSp>
-        <p:nvCxnSpPr>
-          <p:cNvPr id="9" name="C3-E31 arrow 7" descr="sci-ppt:o007"/>
-          <p:cNvCxnSpPr/>
-          <p:nvPr/>
-        </p:nvCxnSpPr>
-        <p:spPr>
-          <a:xfrm>
-            <a:off x="3108960" y="2057400"/>
-            <a:ext cx="4617719" cy="0"/>
-          </a:xfrm>
-          <a:prstGeom prst="line">
-            <a:avLst/>
-          </a:prstGeom>
-          <a:ln w="25400">
-            <a:solidFill>
-              <a:srgbClr val="8EDBD4"/>
-            </a:solidFill>
-            <a:headEnd type="none" w="med" len="med"/>
-            <a:tailEnd type="triangle" w="med" len="med"/>
-          </a:ln>
-          <a:effectLst/>
-        </p:spPr>
-      </p:cxnSp>
-      <p:sp>
-        <p:nvSpPr>
-          <p:cNvPr id="10" name="C3-E31 text 8" descr="sci-ppt:o008"/>
+              <a:t>E_B,tot = N (4π/3) Δp_c Rₘₐₓ,N³,   Rₘₐₓ,N = R_* N^(−1/3)</a:t>
+            </a:r>
+          </a:p>
+        </p:txBody>
+      </p:sp>
+      <p:sp>
+        <p:nvSpPr>
+          <p:cNvPr id="41" name="C3-E31 text 39" descr="sci-ppt:o039"/>
           <p:cNvSpPr txBox="1"/>
           <p:nvPr/>
         </p:nvSpPr>
         <p:spPr>
           <a:xfrm>
-            <a:off x="3749039" y="1600200"/>
-            <a:ext cx="3931920" cy="365760"/>
+            <a:off x="502920" y="4572000"/>
+            <a:ext cx="6766560" cy="231648"/>
           </a:xfrm>
           <a:prstGeom prst="rect">
             <a:avLst/>
@@ -3384,7 +4421,7 @@
           <a:effectLst/>
         </p:spPr>
         <p:txBody>
-          <a:bodyPr wrap="square" lIns="27432" rIns="27432" tIns="18288" bIns="18288" anchor="ctr">
+          <a:bodyPr wrap="none" lIns="18288" rIns="18288" tIns="18288" bIns="18288" anchor="t">
             <a:spAutoFit/>
           </a:bodyPr>
           <a:lstStyle/>
@@ -3395,27 +4432,27 @@
               </a:spcAft>
             </a:pPr>
             <a:r>
-              <a:rPr sz="1800" b="0" i="0">
+              <a:rPr sz="1200" b="0" i="0">
                 <a:solidFill>
-                  <a:srgbClr val="E7F0F3"/>
+                  <a:srgbClr val="B4C7D2"/>
                 </a:solidFill>
                 <a:latin typeface="Arial"/>
               </a:rPr>
-              <a:t>Shared liquid: ρ, p∞</a:t>
-            </a:r>
-          </a:p>
-        </p:txBody>
-      </p:sp>
-      <p:sp>
-        <p:nvSpPr>
-          <p:cNvPr id="11" name="C3-E31 text 9" descr="sci-ppt:o009"/>
+              <a:t>Identical constant-pressure ideal cavities; the coupled row needs far separation.</a:t>
+            </a:r>
+          </a:p>
+        </p:txBody>
+      </p:sp>
+      <p:sp>
+        <p:nvSpPr>
+          <p:cNvPr id="42" name="C3-E31 text 40" descr="sci-ppt:o040"/>
           <p:cNvSpPr txBox="1"/>
           <p:nvPr/>
         </p:nvSpPr>
         <p:spPr>
           <a:xfrm>
-            <a:off x="548640" y="777240"/>
-            <a:ext cx="10972800" cy="411480"/>
+            <a:off x="7680960" y="5074920"/>
+            <a:ext cx="4114800" cy="433070"/>
           </a:xfrm>
           <a:prstGeom prst="rect">
             <a:avLst/>
@@ -3424,7 +4461,7 @@
           <a:effectLst/>
         </p:spPr>
         <p:txBody>
-          <a:bodyPr wrap="square" lIns="27432" rIns="27432" tIns="18288" bIns="18288" anchor="ctr">
+          <a:bodyPr wrap="none" lIns="18288" rIns="18288" tIns="18288" bIns="18288" anchor="t">
             <a:spAutoFit/>
           </a:bodyPr>
           <a:lstStyle/>
@@ -3435,27 +4472,43 @@
               </a:spcAft>
             </a:pPr>
             <a:r>
-              <a:rPr sz="1800" b="0" i="0">
+              <a:rPr sz="1250" b="0" i="0">
                 <a:solidFill>
-                  <a:srgbClr val="E7F0F3"/>
+                  <a:srgbClr val="F2B880"/>
                 </a:solidFill>
                 <a:latin typeface="Arial"/>
               </a:rPr>
-              <a:t>Fixed centres; spherical cavities; R_i, R_j ≪ d_ij</a:t>
-            </a:r>
-          </a:p>
-        </p:txBody>
-      </p:sp>
-      <p:sp>
-        <p:nvSpPr>
-          <p:cNvPr id="12" name="C3-E31 text 10" descr="sci-ppt:o010"/>
+              <a:t>Use connectivity and source allocation before</a:t>
+            </a:r>
+          </a:p>
+          <a:p>
+            <a:pPr algn="l">
+              <a:spcAft>
+                <a:spcPts val="0"/>
+              </a:spcAft>
+            </a:pPr>
+            <a:r>
+              <a:rPr sz="1250" b="0" i="0">
+                <a:solidFill>
+                  <a:srgbClr val="F2B880"/>
+                </a:solidFill>
+                <a:latin typeface="Arial"/>
+              </a:rPr>
+              <a:t>summing outputs.</a:t>
+            </a:r>
+          </a:p>
+        </p:txBody>
+      </p:sp>
+      <p:sp>
+        <p:nvSpPr>
+          <p:cNvPr id="43" name="C3-E31 text 41" descr="sci-ppt:o041"/>
           <p:cNvSpPr txBox="1"/>
           <p:nvPr/>
         </p:nvSpPr>
         <p:spPr>
           <a:xfrm>
-            <a:off x="3657600" y="2423160"/>
-            <a:ext cx="4206240" cy="548640"/>
+            <a:off x="320040" y="6510528"/>
+            <a:ext cx="11521440" cy="200660"/>
           </a:xfrm>
           <a:prstGeom prst="rect">
             <a:avLst/>
@@ -3464,445 +4517,7 @@
           <a:effectLst/>
         </p:spPr>
         <p:txBody>
-          <a:bodyPr wrap="square" lIns="27432" rIns="27432" tIns="18288" bIns="18288" anchor="ctr">
-            <a:spAutoFit/>
-          </a:bodyPr>
-          <a:lstStyle/>
-          <a:p>
-            <a:pPr algn="l">
-              <a:spcAft>
-                <a:spcPts val="0"/>
-              </a:spcAft>
-            </a:pPr>
-            <a:r>
-              <a:rPr sz="1700" b="0" i="0">
-                <a:solidFill>
-                  <a:srgbClr val="8EDBD4"/>
-                </a:solidFill>
-                <a:latin typeface="Arial"/>
-              </a:rPr>
-              <a:t>Source-volume acceleration</a:t>
-            </a:r>
-          </a:p>
-          <a:p>
-            <a:pPr algn="l">
-              <a:spcAft>
-                <a:spcPts val="0"/>
-              </a:spcAft>
-            </a:pPr>
-            <a:r>
-              <a:rPr sz="1700" b="0" i="0">
-                <a:solidFill>
-                  <a:srgbClr val="8EDBD4"/>
-                </a:solidFill>
-                <a:latin typeface="Arial"/>
-              </a:rPr>
-              <a:t>sets the pressure correction.</a:t>
-            </a:r>
-          </a:p>
-        </p:txBody>
-      </p:sp>
-      <p:cxnSp>
-        <p:nvCxnSpPr>
-          <p:cNvPr id="13" name="C3-E31 line 11" descr="sci-ppt:o011"/>
-          <p:cNvCxnSpPr/>
-          <p:nvPr/>
-        </p:nvCxnSpPr>
-        <p:spPr>
-          <a:xfrm>
-            <a:off x="274320" y="3977639"/>
-            <a:ext cx="11612880" cy="0"/>
-          </a:xfrm>
-          <a:prstGeom prst="line">
-            <a:avLst/>
-          </a:prstGeom>
-          <a:ln w="12700">
-            <a:solidFill>
-              <a:srgbClr val="405967"/>
-            </a:solidFill>
-          </a:ln>
-          <a:effectLst/>
-        </p:spPr>
-      </p:cxnSp>
-      <p:sp>
-        <p:nvSpPr>
-          <p:cNvPr id="14" name="C3-E31 text 12" descr="sci-ppt:o012"/>
-          <p:cNvSpPr txBox="1"/>
-          <p:nvPr/>
-        </p:nvSpPr>
-        <p:spPr>
-          <a:xfrm>
-            <a:off x="320040" y="4096512"/>
-            <a:ext cx="5715000" cy="246888"/>
-          </a:xfrm>
-          <a:prstGeom prst="rect">
-            <a:avLst/>
-          </a:prstGeom>
-          <a:noFill/>
-          <a:effectLst/>
-        </p:spPr>
-        <p:txBody>
-          <a:bodyPr wrap="square" lIns="27432" rIns="27432" tIns="18288" bIns="18288" anchor="ctr">
-            <a:spAutoFit/>
-          </a:bodyPr>
-          <a:lstStyle/>
-          <a:p>
-            <a:pPr algn="l">
-              <a:spcAft>
-                <a:spcPts val="0"/>
-              </a:spcAft>
-            </a:pPr>
-            <a:r>
-              <a:rPr sz="1150" b="0" i="0">
-                <a:solidFill>
-                  <a:srgbClr val="B4C7D2"/>
-                </a:solidFill>
-                <a:latin typeface="Arial"/>
-              </a:rPr>
-              <a:t>• R_i, R_j bubble radii</a:t>
-            </a:r>
-          </a:p>
-        </p:txBody>
-      </p:sp>
-      <p:sp>
-        <p:nvSpPr>
-          <p:cNvPr id="15" name="C3-E31 text 13" descr="sci-ppt:o013"/>
-          <p:cNvSpPr txBox="1"/>
-          <p:nvPr/>
-        </p:nvSpPr>
-        <p:spPr>
-          <a:xfrm>
-            <a:off x="6217920" y="4096512"/>
-            <a:ext cx="5715000" cy="246888"/>
-          </a:xfrm>
-          <a:prstGeom prst="rect">
-            <a:avLst/>
-          </a:prstGeom>
-          <a:noFill/>
-          <a:effectLst/>
-        </p:spPr>
-        <p:txBody>
-          <a:bodyPr wrap="square" lIns="27432" rIns="27432" tIns="18288" bIns="18288" anchor="ctr">
-            <a:spAutoFit/>
-          </a:bodyPr>
-          <a:lstStyle/>
-          <a:p>
-            <a:pPr algn="l">
-              <a:spcAft>
-                <a:spcPts val="0"/>
-              </a:spcAft>
-            </a:pPr>
-            <a:r>
-              <a:rPr sz="1150" b="0" i="0">
-                <a:solidFill>
-                  <a:srgbClr val="B4C7D2"/>
-                </a:solidFill>
-                <a:latin typeface="Arial"/>
-              </a:rPr>
-              <a:t>• d_ij separations; N sites</a:t>
-            </a:r>
-          </a:p>
-        </p:txBody>
-      </p:sp>
-      <p:sp>
-        <p:nvSpPr>
-          <p:cNvPr id="16" name="C3-E31 text 14" descr="sci-ppt:o014"/>
-          <p:cNvSpPr txBox="1"/>
-          <p:nvPr/>
-        </p:nvSpPr>
-        <p:spPr>
-          <a:xfrm>
-            <a:off x="320040" y="4329684"/>
-            <a:ext cx="5715000" cy="246888"/>
-          </a:xfrm>
-          <a:prstGeom prst="rect">
-            <a:avLst/>
-          </a:prstGeom>
-          <a:noFill/>
-          <a:effectLst/>
-        </p:spPr>
-        <p:txBody>
-          <a:bodyPr wrap="square" lIns="27432" rIns="27432" tIns="18288" bIns="18288" anchor="ctr">
-            <a:spAutoFit/>
-          </a:bodyPr>
-          <a:lstStyle/>
-          <a:p>
-            <a:pPr algn="l">
-              <a:spcAft>
-                <a:spcPts val="0"/>
-              </a:spcAft>
-            </a:pPr>
-            <a:r>
-              <a:rPr sz="1150" b="0" i="0">
-                <a:solidFill>
-                  <a:srgbClr val="B4C7D2"/>
-                </a:solidFill>
-                <a:latin typeface="Arial"/>
-              </a:rPr>
-              <a:t>• p_b,i inside; p∞ outside</a:t>
-            </a:r>
-          </a:p>
-        </p:txBody>
-      </p:sp>
-      <p:sp>
-        <p:nvSpPr>
-          <p:cNvPr id="17" name="C3-E31 text 15" descr="sci-ppt:o015"/>
-          <p:cNvSpPr txBox="1"/>
-          <p:nvPr/>
-        </p:nvSpPr>
-        <p:spPr>
-          <a:xfrm>
-            <a:off x="6217920" y="4329684"/>
-            <a:ext cx="5715000" cy="246888"/>
-          </a:xfrm>
-          <a:prstGeom prst="rect">
-            <a:avLst/>
-          </a:prstGeom>
-          <a:noFill/>
-          <a:effectLst/>
-        </p:spPr>
-        <p:txBody>
-          <a:bodyPr wrap="square" lIns="27432" rIns="27432" tIns="18288" bIns="18288" anchor="ctr">
-            <a:spAutoFit/>
-          </a:bodyPr>
-          <a:lstStyle/>
-          <a:p>
-            <a:pPr algn="l">
-              <a:spcAft>
-                <a:spcPts val="0"/>
-              </a:spcAft>
-            </a:pPr>
-            <a:r>
-              <a:rPr sz="1150" b="0" i="0">
-                <a:solidFill>
-                  <a:srgbClr val="B4C7D2"/>
-                </a:solidFill>
-                <a:latin typeface="Arial"/>
-              </a:rPr>
-              <a:t>• Ṙ_i, R̈_i, Ṙ_j, R̈_j</a:t>
-            </a:r>
-          </a:p>
-        </p:txBody>
-      </p:sp>
-      <p:sp>
-        <p:nvSpPr>
-          <p:cNvPr id="18" name="C3-E31 text 16" descr="sci-ppt:o016"/>
-          <p:cNvSpPr txBox="1"/>
-          <p:nvPr/>
-        </p:nvSpPr>
-        <p:spPr>
-          <a:xfrm>
-            <a:off x="320040" y="4562856"/>
-            <a:ext cx="5715000" cy="246888"/>
-          </a:xfrm>
-          <a:prstGeom prst="rect">
-            <a:avLst/>
-          </a:prstGeom>
-          <a:noFill/>
-          <a:effectLst/>
-        </p:spPr>
-        <p:txBody>
-          <a:bodyPr wrap="square" lIns="27432" rIns="27432" tIns="18288" bIns="18288" anchor="ctr">
-            <a:spAutoFit/>
-          </a:bodyPr>
-          <a:lstStyle/>
-          <a:p>
-            <a:pPr algn="l">
-              <a:spcAft>
-                <a:spcPts val="0"/>
-              </a:spcAft>
-            </a:pPr>
-            <a:r>
-              <a:rPr sz="1150" b="0" i="0">
-                <a:solidFill>
-                  <a:srgbClr val="B4C7D2"/>
-                </a:solidFill>
-                <a:latin typeface="Arial"/>
-              </a:rPr>
-              <a:t>• σ_b, μ, ρ balance parameters</a:t>
-            </a:r>
-          </a:p>
-        </p:txBody>
-      </p:sp>
-      <p:sp>
-        <p:nvSpPr>
-          <p:cNvPr id="19" name="C3-E31 text 17" descr="sci-ppt:o017"/>
-          <p:cNvSpPr txBox="1"/>
-          <p:nvPr/>
-        </p:nvSpPr>
-        <p:spPr>
-          <a:xfrm>
-            <a:off x="6217920" y="4562856"/>
-            <a:ext cx="5715000" cy="246888"/>
-          </a:xfrm>
-          <a:prstGeom prst="rect">
-            <a:avLst/>
-          </a:prstGeom>
-          <a:noFill/>
-          <a:effectLst/>
-        </p:spPr>
-        <p:txBody>
-          <a:bodyPr wrap="square" lIns="27432" rIns="27432" tIns="18288" bIns="18288" anchor="ctr">
-            <a:spAutoFit/>
-          </a:bodyPr>
-          <a:lstStyle/>
-          <a:p>
-            <a:pPr algn="l">
-              <a:spcAft>
-                <a:spcPts val="0"/>
-              </a:spcAft>
-            </a:pPr>
-            <a:r>
-              <a:rPr sz="1150" b="0" i="0">
-                <a:solidFill>
-                  <a:srgbClr val="B4C7D2"/>
-                </a:solidFill>
-                <a:latin typeface="Arial"/>
-              </a:rPr>
-              <a:t>• E_B,tot fixed work; Δp_c</a:t>
-            </a:r>
-          </a:p>
-        </p:txBody>
-      </p:sp>
-      <p:sp>
-        <p:nvSpPr>
-          <p:cNvPr id="20" name="C3-E31 text 18" descr="sci-ppt:o018"/>
-          <p:cNvSpPr txBox="1"/>
-          <p:nvPr/>
-        </p:nvSpPr>
-        <p:spPr>
-          <a:xfrm>
-            <a:off x="320040" y="4796028"/>
-            <a:ext cx="5715000" cy="246888"/>
-          </a:xfrm>
-          <a:prstGeom prst="rect">
-            <a:avLst/>
-          </a:prstGeom>
-          <a:noFill/>
-          <a:effectLst/>
-        </p:spPr>
-        <p:txBody>
-          <a:bodyPr wrap="square" lIns="27432" rIns="27432" tIns="18288" bIns="18288" anchor="ctr">
-            <a:spAutoFit/>
-          </a:bodyPr>
-          <a:lstStyle/>
-          <a:p>
-            <a:pPr algn="l">
-              <a:spcAft>
-                <a:spcPts val="0"/>
-              </a:spcAft>
-            </a:pPr>
-            <a:r>
-              <a:rPr sz="1150" b="0" i="0">
-                <a:solidFill>
-                  <a:srgbClr val="B4C7D2"/>
-                </a:solidFill>
-                <a:latin typeface="Arial"/>
-              </a:rPr>
-              <a:t>• R_max,N = R_* N^−1/3; π</a:t>
-            </a:r>
-          </a:p>
-        </p:txBody>
-      </p:sp>
-      <p:sp>
-        <p:nvSpPr>
-          <p:cNvPr id="21" name="C3-E31 text 19" descr="sci-ppt:o019"/>
-          <p:cNvSpPr txBox="1"/>
-          <p:nvPr/>
-        </p:nvSpPr>
-        <p:spPr>
-          <a:xfrm>
-            <a:off x="320040" y="5596128"/>
-            <a:ext cx="11430000" cy="292608"/>
-          </a:xfrm>
-          <a:prstGeom prst="rect">
-            <a:avLst/>
-          </a:prstGeom>
-          <a:noFill/>
-          <a:effectLst/>
-        </p:spPr>
-        <p:txBody>
-          <a:bodyPr wrap="square" lIns="27432" rIns="27432" tIns="18288" bIns="18288" anchor="ctr">
-            <a:spAutoFit/>
-          </a:bodyPr>
-          <a:lstStyle/>
-          <a:p>
-            <a:pPr algn="l">
-              <a:spcAft>
-                <a:spcPts val="0"/>
-              </a:spcAft>
-            </a:pPr>
-            <a:r>
-              <a:rPr sz="1150" b="0" i="0">
-                <a:solidFill>
-                  <a:srgbClr val="8EDBD4"/>
-                </a:solidFill>
-                <a:latin typeface="Arial"/>
-              </a:rPr>
-              <a:t>Hydraulic connectivity decides whether sources are independent</a:t>
-            </a:r>
-          </a:p>
-        </p:txBody>
-      </p:sp>
-      <p:sp>
-        <p:nvSpPr>
-          <p:cNvPr id="22" name="C3-E31 text 20" descr="sci-ppt:o020"/>
-          <p:cNvSpPr txBox="1"/>
-          <p:nvPr/>
-        </p:nvSpPr>
-        <p:spPr>
-          <a:xfrm>
-            <a:off x="320040" y="5870448"/>
-            <a:ext cx="11430000" cy="292608"/>
-          </a:xfrm>
-          <a:prstGeom prst="rect">
-            <a:avLst/>
-          </a:prstGeom>
-          <a:noFill/>
-          <a:effectLst/>
-        </p:spPr>
-        <p:txBody>
-          <a:bodyPr wrap="square" lIns="27432" rIns="27432" tIns="18288" bIns="18288" anchor="ctr">
-            <a:spAutoFit/>
-          </a:bodyPr>
-          <a:lstStyle/>
-          <a:p>
-            <a:pPr algn="l">
-              <a:spcAft>
-                <a:spcPts val="0"/>
-              </a:spcAft>
-            </a:pPr>
-            <a:r>
-              <a:rPr sz="1150" b="0" i="0">
-                <a:solidFill>
-                  <a:srgbClr val="8EDBD4"/>
-                </a:solidFill>
-                <a:latin typeface="Arial"/>
-              </a:rPr>
-              <a:t>Fixed total work changes each cavity scale</a:t>
-            </a:r>
-          </a:p>
-        </p:txBody>
-      </p:sp>
-      <p:sp>
-        <p:nvSpPr>
-          <p:cNvPr id="23" name="C3-E31 text 21" descr="sci-ppt:o021"/>
-          <p:cNvSpPr txBox="1"/>
-          <p:nvPr/>
-        </p:nvSpPr>
-        <p:spPr>
-          <a:xfrm>
-            <a:off x="320040" y="6473952"/>
-            <a:ext cx="11430000" cy="256032"/>
-          </a:xfrm>
-          <a:prstGeom prst="rect">
-            <a:avLst/>
-          </a:prstGeom>
-          <a:noFill/>
-          <a:effectLst/>
-        </p:spPr>
-        <p:txBody>
-          <a:bodyPr wrap="square" lIns="27432" rIns="27432" tIns="18288" bIns="18288" anchor="ctr">
+          <a:bodyPr wrap="none" lIns="18288" rIns="18288" tIns="18288" bIns="18288" anchor="t">
             <a:spAutoFit/>
           </a:bodyPr>
           <a:lstStyle/>
@@ -3919,7 +4534,7 @@
                 </a:solidFill>
                 <a:latin typeface="Arial"/>
               </a:rPr>
-              <a:t>Model schematic; geometry is not to scale.</a:t>
+              <a:t>Reference formulas of the Defence 1 answer: Eqs. C3-E05 and C3-E11.</a:t>
             </a:r>
           </a:p>
         </p:txBody>
